--- a/poster/poster_capstone_v24.pptx
+++ b/poster/poster_capstone_v24.pptx
@@ -3166,7 +3166,7 @@
                 <a:ea typeface="Palatino Linotype" pitchFamily="34" charset="-122"/>
                 <a:cs typeface="Palatino Linotype" pitchFamily="34" charset="-120"/>
               </a:rPr>
-              <a:t>Question: can measured spatial correlation actually lower out-of-sample carbon?</a:t>
+              <a:t>Question: can measured cross-region correlation actually lower out-of-sample carbon?</a:t>
             </a:r>
             <a:endParaRPr lang="en-US" sz="1800" dirty="0"/>
           </a:p>
@@ -3846,7 +3846,7 @@
                 <a:ea typeface="Palatino Linotype" pitchFamily="34" charset="-122"/>
                 <a:cs typeface="Palatino Linotype" pitchFamily="34" charset="-120"/>
               </a:rPr>
-              <a:t> zeroes exactly those blocks. We add copula and tail checks, mean ablations, and walk-forward validation to 2025.</a:t>
+              <a:t> zeroes exactly those blocks. We add copula and tail checks, mean-leveling tests, and walk-forward validation to 2025.</a:t>
             </a:r>
             <a:endParaRPr lang="en-US" sz="1700" dirty="0"/>
           </a:p>
@@ -3992,7 +3992,7 @@
                 <a:ea typeface="Palatino Linotype" pitchFamily="34" charset="-122"/>
                 <a:cs typeface="Palatino Linotype" pitchFamily="34" charset="-120"/>
               </a:rPr>
-              <a:t>194</a:t>
+              <a:t>199</a:t>
             </a:r>
             <a:endParaRPr lang="en-US" sz="3300" dirty="0"/>
           </a:p>
@@ -5952,7 +5952,7 @@
                 <a:ea typeface="Palatino Linotype" pitchFamily="34" charset="-122"/>
                 <a:cs typeface="Palatino Linotype" pitchFamily="34" charset="-120"/>
               </a:rPr>
-              <a:t>Mean ablation isolates the cause. Hold the covariance fixed and flatten the mean field, and the same spatial structure now pays </a:t>
+              <a:t>The mean-leveling test isolates the cause. Hold the covariance fixed and flatten the mean field, and the same cross-region structure now pays </a:t>
             </a:r>
             <a:pPr algn="l" indent="0" marL="0">
               <a:lnSpc>

--- a/poster/poster_capstone_v24.pptx
+++ b/poster/poster_capstone_v24.pptx
@@ -5598,7 +5598,7 @@
         <p:spPr>
           <a:xfrm>
             <a:off x="15322296" y="24864876"/>
-            <a:ext cx="7083552" cy="2830935"/>
+            <a:ext cx="7083552" cy="2935957"/>
           </a:xfrm>
           <a:prstGeom prst="rect">
             <a:avLst/>
@@ -5616,7 +5616,7 @@
       </p:sp>
       <p:pic>
         <p:nvPicPr>
-          <p:cNvPr id="119" name="Image 7" descr="figs/copula_result.png">    </p:cNvPr>
+          <p:cNvPr id="119" name="Image 7" descr="figs/complexity_frontier.png">    </p:cNvPr>
           <p:cNvPicPr>
             <a:picLocks noChangeAspect="1"/>
           </p:cNvPicPr>
@@ -5630,7 +5630,7 @@
         <p:spPr>
           <a:xfrm>
             <a:off x="15486888" y="24983748"/>
-            <a:ext cx="6754368" cy="2593191"/>
+            <a:ext cx="6754368" cy="2698213"/>
           </a:xfrm>
           <a:prstGeom prst="rect">
             <a:avLst/>
@@ -5645,7 +5645,7 @@
         </p:nvSpPr>
         <p:spPr>
           <a:xfrm>
-            <a:off x="15441168" y="27714099"/>
+            <a:off x="15441168" y="27819121"/>
             <a:ext cx="6845808" cy="548640"/>
           </a:xfrm>
           <a:prstGeom prst="rect">
@@ -5673,7 +5673,7 @@
                 <a:ea typeface="Palatino Linotype" pitchFamily="34" charset="-122"/>
                 <a:cs typeface="Palatino Linotype" pitchFamily="34" charset="-120"/>
               </a:rPr>
-              <a:t>Gaussian, Clayton, even the comonotone (maximal) copula: </a:t>
+              <a:t>Cumulative savings vs. carbon-blind </a:t>
             </a:r>
             <a:pPr algn="l" indent="0" marL="0">
               <a:lnSpc>
@@ -5690,7 +5690,24 @@
                 <a:ea typeface="Palatino Linotype" pitchFamily="34" charset="-122"/>
                 <a:cs typeface="Palatino Linotype" pitchFamily="34" charset="-120"/>
               </a:rPr>
-              <a:t>every gain sits at the noise floor.</a:t>
+              <a:t>jump once (transfer), then stay flat</a:t>
+            </a:r>
+            <a:pPr algn="l" indent="0" marL="0">
+              <a:lnSpc>
+                <a:spcPct val="102000"/>
+              </a:lnSpc>
+              <a:buNone/>
+            </a:pPr>
+            <a:r>
+              <a:rPr lang="en-US" sz="1650" i="1" dirty="0">
+                <a:solidFill>
+                  <a:srgbClr val="586173"/>
+                </a:solidFill>
+                <a:latin typeface="Palatino Linotype" pitchFamily="34" charset="0"/>
+                <a:ea typeface="Palatino Linotype" pitchFamily="34" charset="-122"/>
+                <a:cs typeface="Palatino Linotype" pitchFamily="34" charset="-120"/>
+              </a:rPr>
+              <a:t>: joint covariance, the robust DRO, and copulas (Gaussian, Clayton, comonotone) each add nothing.</a:t>
             </a:r>
             <a:endParaRPr lang="en-US" sz="1650" dirty="0"/>
           </a:p>
@@ -5704,8 +5721,8 @@
         </p:nvSpPr>
         <p:spPr>
           <a:xfrm>
-            <a:off x="15441168" y="28372467"/>
-            <a:ext cx="6845808" cy="1436973"/>
+            <a:off x="15441168" y="28477489"/>
+            <a:ext cx="6845808" cy="1331951"/>
           </a:xfrm>
           <a:prstGeom prst="rect">
             <a:avLst/>
@@ -5724,8 +5741,8 @@
         </p:nvSpPr>
         <p:spPr>
           <a:xfrm>
-            <a:off x="15441168" y="28372467"/>
-            <a:ext cx="146304" cy="1436973"/>
+            <a:off x="15441168" y="28477489"/>
+            <a:ext cx="146304" cy="1331951"/>
           </a:xfrm>
           <a:prstGeom prst="rect">
             <a:avLst/>
@@ -5744,8 +5761,8 @@
         </p:nvSpPr>
         <p:spPr>
           <a:xfrm>
-            <a:off x="15752064" y="28372467"/>
-            <a:ext cx="6278880" cy="1436973"/>
+            <a:off x="15752064" y="28477489"/>
+            <a:ext cx="6278880" cy="1331951"/>
           </a:xfrm>
           <a:prstGeom prst="rect">
             <a:avLst/>

--- a/poster/poster_capstone_v24.pptx
+++ b/poster/poster_capstone_v24.pptx
@@ -1251,12 +1251,12 @@
           <a:p>
             <a:pPr algn="ctr" indent="0" marL="0">
               <a:lnSpc>
-                <a:spcPct val="100000"/>
-              </a:lnSpc>
-              <a:buNone/>
-            </a:pPr>
-            <a:r>
-              <a:rPr lang="en-US" sz="4700" b="1" dirty="0">
+                <a:spcPct val="95000"/>
+              </a:lnSpc>
+              <a:buNone/>
+            </a:pPr>
+            <a:r>
+              <a:rPr lang="en-US" sz="3500" b="1" dirty="0">
                 <a:solidFill>
                   <a:srgbClr val="FFFFFF"/>
                 </a:solidFill>
@@ -1264,19 +1264,19 @@
                 <a:ea typeface="Palatino Linotype" pitchFamily="34" charset="-122"/>
                 <a:cs typeface="Palatino Linotype" pitchFamily="34" charset="-120"/>
               </a:rPr>
-              <a:t>The Price of Sophistication: When Do Spatial and</a:t>
-            </a:r>
-            <a:endParaRPr lang="en-US" sz="4700" dirty="0"/>
+              <a:t>The Price of Sophistication:</a:t>
+            </a:r>
+            <a:endParaRPr lang="en-US" sz="3500" dirty="0"/>
           </a:p>
           <a:p>
             <a:pPr algn="ctr" indent="0" marL="0">
               <a:lnSpc>
-                <a:spcPct val="100000"/>
-              </a:lnSpc>
-              <a:buNone/>
-            </a:pPr>
-            <a:r>
-              <a:rPr lang="en-US" sz="4700" b="1" dirty="0">
+                <a:spcPct val="95000"/>
+              </a:lnSpc>
+              <a:buNone/>
+            </a:pPr>
+            <a:r>
+              <a:rPr lang="en-US" sz="3500" b="1" dirty="0">
                 <a:solidFill>
                   <a:srgbClr val="FFFFFF"/>
                 </a:solidFill>
@@ -1284,9 +1284,29 @@
                 <a:ea typeface="Palatino Linotype" pitchFamily="34" charset="-122"/>
                 <a:cs typeface="Palatino Linotype" pitchFamily="34" charset="-120"/>
               </a:rPr>
-              <a:t>Robust Models Pay in Carbon-Aware Scheduling?</a:t>
-            </a:r>
-            <a:endParaRPr lang="en-US" sz="4700" dirty="0"/>
+              <a:t>A Pre-Registered Falsification Test for When Spatial and</a:t>
+            </a:r>
+            <a:endParaRPr lang="en-US" sz="3500" dirty="0"/>
+          </a:p>
+          <a:p>
+            <a:pPr algn="ctr" indent="0" marL="0">
+              <a:lnSpc>
+                <a:spcPct val="95000"/>
+              </a:lnSpc>
+              <a:buNone/>
+            </a:pPr>
+            <a:r>
+              <a:rPr lang="en-US" sz="3500" b="1" dirty="0">
+                <a:solidFill>
+                  <a:srgbClr val="FFFFFF"/>
+                </a:solidFill>
+                <a:latin typeface="Palatino Linotype" pitchFamily="34" charset="0"/>
+                <a:ea typeface="Palatino Linotype" pitchFamily="34" charset="-122"/>
+                <a:cs typeface="Palatino Linotype" pitchFamily="34" charset="-120"/>
+              </a:rPr>
+              <a:t>Robust Modelling Pay in Carbon-Aware Scheduling</a:t>
+            </a:r>
+            <a:endParaRPr lang="en-US" sz="3500" dirty="0"/>
           </a:p>
         </p:txBody>
       </p:sp>
@@ -3992,7 +4012,7 @@
                 <a:ea typeface="Palatino Linotype" pitchFamily="34" charset="-122"/>
                 <a:cs typeface="Palatino Linotype" pitchFamily="34" charset="-120"/>
               </a:rPr>
-              <a:t>199</a:t>
+              <a:t>202</a:t>
             </a:r>
             <a:endParaRPr lang="en-US" sz="3300" dirty="0"/>
           </a:p>

--- a/poster/poster_capstone_v24.pptx
+++ b/poster/poster_capstone_v24.pptx
@@ -1284,7 +1284,7 @@
                 <a:ea typeface="Palatino Linotype" pitchFamily="34" charset="-122"/>
                 <a:cs typeface="Palatino Linotype" pitchFamily="34" charset="-120"/>
               </a:rPr>
-              <a:t>A Pre-Registered Falsification Test for When Spatial and</a:t>
+              <a:t>A Pre-Committed Falsification Test for When Spatial and</a:t>
             </a:r>
             <a:endParaRPr lang="en-US" sz="3500" dirty="0"/>
           </a:p>
@@ -3832,7 +3832,7 @@
                 <a:ea typeface="Palatino Linotype" pitchFamily="34" charset="-122"/>
                 <a:cs typeface="Palatino Linotype" pitchFamily="34" charset="-120"/>
               </a:rPr>
-              <a:t>; the pre-registered </a:t>
+              <a:t>; the pre-committed </a:t>
             </a:r>
             <a:pPr algn="l" indent="0" marL="0">
               <a:lnSpc>

--- a/poster/poster_capstone_v24.pptx
+++ b/poster/poster_capstone_v24.pptx
@@ -1952,7 +1952,7 @@
                 <a:ea typeface="Palatino Linotype" pitchFamily="34" charset="-122"/>
                 <a:cs typeface="Palatino Linotype" pitchFamily="34" charset="-120"/>
               </a:rPr>
-              <a:t>real grids never reach</a:t>
+              <a:t>real grids have not reached</a:t>
             </a:r>
             <a:pPr algn="ctr" indent="0" marL="0">
               <a:lnSpc>
@@ -7154,7 +7154,7 @@
                 <a:ea typeface="Palatino Linotype" pitchFamily="34" charset="-122"/>
                 <a:cs typeface="Palatino Linotype" pitchFamily="34" charset="-120"/>
               </a:rPr>
-              <a:t> cuts 4 to 10 percent of carbon, deterministically. The sophisticated layers (joint covariance, copulas, distributional robustness) add nothing until grid emergencies hit 3x severity, which real grids never reach. Deploy the simple migration scheduler; price robustness only if your grid faces genuine extremes.</a:t>
+              <a:t> cuts 4 to 10 percent of carbon, deterministically. The sophisticated layers (joint covariance, copulas, distributional robustness) add nothing until grid emergencies hit 3x severity, which real grids have not reached. Deploy the simple migration scheduler; price robustness only if your grid faces genuine extremes.</a:t>
             </a:r>
             <a:endParaRPr lang="en-US" sz="1900" dirty="0"/>
           </a:p>
@@ -7358,7 +7358,7 @@
                 <a:ea typeface="Palatino Linotype" pitchFamily="34" charset="-122"/>
                 <a:cs typeface="Palatino Linotype" pitchFamily="34" charset="-120"/>
               </a:rPr>
-              <a:t>Deploy the deterministic migration scheduler; skip joint-covariance and copula modeling; price robustness only past a severity real grids never reach.</a:t>
+              <a:t>Deploy the deterministic migration scheduler; skip joint-covariance and copula modeling; price robustness only past a severity real grids have not reached.</a:t>
             </a:r>
             <a:endParaRPr lang="en-US" sz="2500" dirty="0"/>
           </a:p>

--- a/poster/poster_capstone_v24.pptx
+++ b/poster/poster_capstone_v24.pptx
@@ -6130,7 +6130,7 @@
       </p:sp>
       <p:pic>
         <p:nvPicPr>
-          <p:cNvPr id="130" name="Image 9" descr="figs/certificate_canyon.png">    </p:cNvPr>
+          <p:cNvPr id="130" name="Image 9" descr="figs/positive_control.png">    </p:cNvPr>
           <p:cNvPicPr>
             <a:picLocks noChangeAspect="1"/>
           </p:cNvPicPr>
@@ -6187,7 +6187,7 @@
                 <a:ea typeface="Palatino Linotype" pitchFamily="34" charset="-122"/>
                 <a:cs typeface="Palatino Linotype" pitchFamily="34" charset="-120"/>
               </a:rPr>
-              <a:t>The mean-dominance theorem caps the gap a-priori at </a:t>
+              <a:t>The </a:t>
             </a:r>
             <a:pPr algn="l" indent="0" marL="0">
               <a:lnSpc>
@@ -6204,7 +6204,7 @@
                 <a:ea typeface="Palatino Linotype" pitchFamily="34" charset="-122"/>
                 <a:cs typeface="Palatino Linotype" pitchFamily="34" charset="-120"/>
               </a:rPr>
-              <a:t>7 to 13% of CVaR</a:t>
+              <a:t>positive control</a:t>
             </a:r>
             <a:pPr algn="l" indent="0" marL="0">
               <a:lnSpc>
@@ -6221,7 +6221,41 @@
                 <a:ea typeface="Palatino Linotype" pitchFamily="34" charset="-122"/>
                 <a:cs typeface="Palatino Linotype" pitchFamily="34" charset="-120"/>
               </a:rPr>
-              <a:t>; the realized gap never exceeds 0.23%, about 100x below its own bound.</a:t>
+              <a:t>: flatten each region's mean and the cross-region signal appears (Diversified </a:t>
+            </a:r>
+            <a:pPr algn="l" indent="0" marL="0">
+              <a:lnSpc>
+                <a:spcPct val="102000"/>
+              </a:lnSpc>
+              <a:buNone/>
+            </a:pPr>
+            <a:r>
+              <a:rPr lang="en-US" sz="1650" b="1" i="1" dirty="0">
+                <a:solidFill>
+                  <a:srgbClr val="8A5C16"/>
+                </a:solidFill>
+                <a:latin typeface="Palatino Linotype" pitchFamily="34" charset="0"/>
+                <a:ea typeface="Palatino Linotype" pitchFamily="34" charset="-122"/>
+                <a:cs typeface="Palatino Linotype" pitchFamily="34" charset="-120"/>
+              </a:rPr>
+              <a:t>+1.46%</a:t>
+            </a:r>
+            <a:pPr algn="l" indent="0" marL="0">
+              <a:lnSpc>
+                <a:spcPct val="102000"/>
+              </a:lnSpc>
+              <a:buNone/>
+            </a:pPr>
+            <a:r>
+              <a:rPr lang="en-US" sz="1650" i="1" dirty="0">
+                <a:solidFill>
+                  <a:srgbClr val="586173"/>
+                </a:solidFill>
+                <a:latin typeface="Palatino Linotype" pitchFamily="34" charset="0"/>
+                <a:ea typeface="Palatino Linotype" pitchFamily="34" charset="-122"/>
+                <a:cs typeface="Palatino Linotype" pitchFamily="34" charset="-120"/>
+              </a:rPr>
+              <a:t>); in the real world it stays below the 0.4% line, so the null is a true negative.</a:t>
             </a:r>
             <a:endParaRPr lang="en-US" sz="1650" dirty="0"/>
           </a:p>
